--- a/dataset/guides_final/SYS/guide/IT-SYS-001_그룹웨어·ERP 이용 오류 대응 가이드.pptx
+++ b/dataset/guides_final/SYS/guide/IT-SYS-001_그룹웨어·ERP 이용 오류 대응 가이드.pptx
@@ -3259,7 +3259,7 @@
                 <a:ea typeface="Malgun Gothic"/>
                 <a:cs typeface="Malgun Gothic"/>
               </a:rPr>
-              <a:t>한화시스템 ICT 임직원 IT 안내 · 사내 시스템</a:t>
+              <a:t>가상 ICT 기업 임직원 IT 안내 · 사내 시스템</a:t>
             </a:r>
           </a:p>
         </p:txBody>
@@ -3491,7 +3491,7 @@
                 <a:ea typeface="Malgun Gothic"/>
                 <a:cs typeface="Malgun Gothic"/>
               </a:rPr>
-              <a:t>© HANWHA SYSTEMS ICT · IT-SYS-001 · 사내 일반</a:t>
+              <a:t>© 가상 ICT 기업 · IT-SYS-001 · 사내 일반</a:t>
             </a:r>
           </a:p>
         </p:txBody>
@@ -6383,7 +6383,7 @@
                 <a:ea typeface="Malgun Gothic"/>
                 <a:cs typeface="Malgun Gothic"/>
               </a:rPr>
-              <a:t>© HANWHA SYSTEMS ICT · IT-SYS-001 · 사내 일반</a:t>
+              <a:t>© 가상 ICT 기업 · IT-SYS-001 · 사내 일반</a:t>
             </a:r>
           </a:p>
         </p:txBody>
@@ -7135,7 +7135,7 @@
                 <a:ea typeface="Malgun Gothic"/>
                 <a:cs typeface="Malgun Gothic"/>
               </a:rPr>
-              <a:t>© HANWHA SYSTEMS ICT · IT-SYS-001 · 사내 일반</a:t>
+              <a:t>© 가상 ICT 기업 · IT-SYS-001 · 사내 일반</a:t>
             </a:r>
           </a:p>
         </p:txBody>
@@ -7817,7 +7817,7 @@
                 <a:ea typeface="Malgun Gothic"/>
                 <a:cs typeface="Malgun Gothic"/>
               </a:rPr>
-              <a:t>© HANWHA SYSTEMS ICT · IT-SYS-001 · 사내 일반</a:t>
+              <a:t>© 가상 ICT 기업 · IT-SYS-001 · 사내 일반</a:t>
             </a:r>
           </a:p>
         </p:txBody>
@@ -8428,7 +8428,7 @@
                 <a:ea typeface="Malgun Gothic"/>
                 <a:cs typeface="Malgun Gothic"/>
               </a:rPr>
-              <a:t>© HANWHA SYSTEMS ICT · IT-SYS-001 · 사내 일반</a:t>
+              <a:t>© 가상 ICT 기업 · IT-SYS-001 · 사내 일반</a:t>
             </a:r>
           </a:p>
         </p:txBody>
@@ -9014,7 +9014,7 @@
                 <a:ea typeface="Malgun Gothic"/>
                 <a:cs typeface="Malgun Gothic"/>
               </a:rPr>
-              <a:t>© HANWHA SYSTEMS ICT · IT-SYS-001 · 사내 일반</a:t>
+              <a:t>© 가상 ICT 기업 · IT-SYS-001 · 사내 일반</a:t>
             </a:r>
           </a:p>
         </p:txBody>
@@ -9553,7 +9553,7 @@
                 <a:ea typeface="Malgun Gothic"/>
                 <a:cs typeface="Malgun Gothic"/>
               </a:rPr>
-              <a:t>© HANWHA SYSTEMS ICT · IT-SYS-001 · 사내 일반</a:t>
+              <a:t>© 가상 ICT 기업 · IT-SYS-001 · 사내 일반</a:t>
             </a:r>
           </a:p>
         </p:txBody>
@@ -10139,7 +10139,7 @@
                 <a:ea typeface="Malgun Gothic"/>
                 <a:cs typeface="Malgun Gothic"/>
               </a:rPr>
-              <a:t>© HANWHA SYSTEMS ICT · IT-SYS-001 · 사내 일반</a:t>
+              <a:t>© 가상 ICT 기업 · IT-SYS-001 · 사내 일반</a:t>
             </a:r>
           </a:p>
         </p:txBody>
@@ -12913,7 +12913,7 @@
                 <a:ea typeface="Malgun Gothic"/>
                 <a:cs typeface="Malgun Gothic"/>
               </a:rPr>
-              <a:t>© HANWHA SYSTEMS ICT · IT-SYS-001 · 사내 일반</a:t>
+              <a:t>© 가상 ICT 기업 · IT-SYS-001 · 사내 일반</a:t>
             </a:r>
           </a:p>
         </p:txBody>
@@ -13594,7 +13594,7 @@
                 <a:ea typeface="Malgun Gothic"/>
                 <a:cs typeface="Malgun Gothic"/>
               </a:rPr>
-              <a:t>© HANWHA SYSTEMS ICT · IT-SYS-001 · 사내 일반</a:t>
+              <a:t>© 가상 ICT 기업 · IT-SYS-001 · 사내 일반</a:t>
             </a:r>
           </a:p>
         </p:txBody>
@@ -14251,7 +14251,7 @@
                 <a:ea typeface="Malgun Gothic"/>
                 <a:cs typeface="Malgun Gothic"/>
               </a:rPr>
-              <a:t>© HANWHA SYSTEMS ICT · IT-SYS-001 · 사내 일반</a:t>
+              <a:t>© 가상 ICT 기업 · IT-SYS-001 · 사내 일반</a:t>
             </a:r>
           </a:p>
         </p:txBody>
@@ -16080,7 +16080,7 @@
                 <a:ea typeface="Malgun Gothic"/>
                 <a:cs typeface="Malgun Gothic"/>
               </a:rPr>
-              <a:t>© HANWHA SYSTEMS ICT · IT-SYS-001 · 사내 일반</a:t>
+              <a:t>© 가상 ICT 기업 · IT-SYS-001 · 사내 일반</a:t>
             </a:r>
           </a:p>
         </p:txBody>
@@ -16785,7 +16785,7 @@
                 <a:ea typeface="Malgun Gothic"/>
                 <a:cs typeface="Malgun Gothic"/>
               </a:rPr>
-              <a:t>© HANWHA SYSTEMS ICT · IT-SYS-001 · 사내 일반</a:t>
+              <a:t>© 가상 ICT 기업 · IT-SYS-001 · 사내 일반</a:t>
             </a:r>
           </a:p>
         </p:txBody>
@@ -17348,7 +17348,7 @@
                 <a:ea typeface="Malgun Gothic"/>
                 <a:cs typeface="Malgun Gothic"/>
               </a:rPr>
-              <a:t>© HANWHA SYSTEMS ICT · IT-SYS-001 · 사내 일반</a:t>
+              <a:t>© 가상 ICT 기업 · IT-SYS-001 · 사내 일반</a:t>
             </a:r>
           </a:p>
         </p:txBody>
@@ -19822,7 +19822,7 @@
                 <a:ea typeface="Malgun Gothic"/>
                 <a:cs typeface="Malgun Gothic"/>
               </a:rPr>
-              <a:t>© HANWHA SYSTEMS ICT · IT-SYS-001 · 사내 일반</a:t>
+              <a:t>© 가상 ICT 기업 · IT-SYS-001 · 사내 일반</a:t>
             </a:r>
           </a:p>
         </p:txBody>
@@ -20408,7 +20408,7 @@
                 <a:ea typeface="Malgun Gothic"/>
                 <a:cs typeface="Malgun Gothic"/>
               </a:rPr>
-              <a:t>© HANWHA SYSTEMS ICT · IT-SYS-001 · 사내 일반</a:t>
+              <a:t>© 가상 ICT 기업 · IT-SYS-001 · 사내 일반</a:t>
             </a:r>
           </a:p>
         </p:txBody>
@@ -21066,7 +21066,7 @@
                 <a:ea typeface="Malgun Gothic"/>
                 <a:cs typeface="Malgun Gothic"/>
               </a:rPr>
-              <a:t>© HANWHA SYSTEMS ICT · IT-SYS-001 · 사내 일반</a:t>
+              <a:t>© 가상 ICT 기업 · IT-SYS-001 · 사내 일반</a:t>
             </a:r>
           </a:p>
         </p:txBody>
@@ -21771,7 +21771,7 @@
                 <a:ea typeface="Malgun Gothic"/>
                 <a:cs typeface="Malgun Gothic"/>
               </a:rPr>
-              <a:t>© HANWHA SYSTEMS ICT · IT-SYS-001 · 사내 일반</a:t>
+              <a:t>© 가상 ICT 기업 · IT-SYS-001 · 사내 일반</a:t>
             </a:r>
           </a:p>
         </p:txBody>
@@ -22405,7 +22405,7 @@
                 <a:ea typeface="Malgun Gothic"/>
                 <a:cs typeface="Malgun Gothic"/>
               </a:rPr>
-              <a:t>© HANWHA SYSTEMS ICT · IT-SYS-001 · 사내 일반</a:t>
+              <a:t>© 가상 ICT 기업 · IT-SYS-001 · 사내 일반</a:t>
             </a:r>
           </a:p>
         </p:txBody>
@@ -25067,7 +25067,7 @@
                 <a:ea typeface="Malgun Gothic"/>
                 <a:cs typeface="Malgun Gothic"/>
               </a:rPr>
-              <a:t>© HANWHA SYSTEMS ICT · IT-SYS-001 · 사내 일반</a:t>
+              <a:t>© 가상 ICT 기업 · IT-SYS-001 · 사내 일반</a:t>
             </a:r>
           </a:p>
         </p:txBody>
@@ -25724,7 +25724,7 @@
                 <a:ea typeface="Malgun Gothic"/>
                 <a:cs typeface="Malgun Gothic"/>
               </a:rPr>
-              <a:t>© HANWHA SYSTEMS ICT · IT-SYS-001 · 사내 일반</a:t>
+              <a:t>© 가상 ICT 기업 · IT-SYS-001 · 사내 일반</a:t>
             </a:r>
           </a:p>
         </p:txBody>
@@ -26500,7 +26500,7 @@
                 <a:ea typeface="Malgun Gothic"/>
                 <a:cs typeface="Malgun Gothic"/>
               </a:rPr>
-              <a:t>© HANWHA SYSTEMS ICT · IT-SYS-001 · 사내 일반</a:t>
+              <a:t>© 가상 ICT 기업 · IT-SYS-001 · 사내 일반</a:t>
             </a:r>
           </a:p>
         </p:txBody>
@@ -27776,7 +27776,7 @@
                 <a:ea typeface="Malgun Gothic"/>
                 <a:cs typeface="Malgun Gothic"/>
               </a:rPr>
-              <a:t>© HANWHA SYSTEMS ICT · IT-SYS-001 · 사내 일반</a:t>
+              <a:t>© 가상 ICT 기업 · IT-SYS-001 · 사내 일반</a:t>
             </a:r>
           </a:p>
         </p:txBody>
@@ -28339,7 +28339,7 @@
                 <a:ea typeface="Malgun Gothic"/>
                 <a:cs typeface="Malgun Gothic"/>
               </a:rPr>
-              <a:t>© HANWHA SYSTEMS ICT · IT-SYS-001 · 사내 일반</a:t>
+              <a:t>© 가상 ICT 기업 · IT-SYS-001 · 사내 일반</a:t>
             </a:r>
           </a:p>
         </p:txBody>
@@ -28925,7 +28925,7 @@
                 <a:ea typeface="Malgun Gothic"/>
                 <a:cs typeface="Malgun Gothic"/>
               </a:rPr>
-              <a:t>© HANWHA SYSTEMS ICT · IT-SYS-001 · 사내 일반</a:t>
+              <a:t>© 가상 ICT 기업 · IT-SYS-001 · 사내 일반</a:t>
             </a:r>
           </a:p>
         </p:txBody>
@@ -29488,7 +29488,7 @@
                 <a:ea typeface="Malgun Gothic"/>
                 <a:cs typeface="Malgun Gothic"/>
               </a:rPr>
-              <a:t>© HANWHA SYSTEMS ICT · IT-SYS-001 · 사내 일반</a:t>
+              <a:t>© 가상 ICT 기업 · IT-SYS-001 · 사내 일반</a:t>
             </a:r>
           </a:p>
         </p:txBody>
@@ -31938,7 +31938,7 @@
                 <a:ea typeface="Malgun Gothic"/>
                 <a:cs typeface="Malgun Gothic"/>
               </a:rPr>
-              <a:t>© HANWHA SYSTEMS ICT · IT-SYS-001 · 사내 일반</a:t>
+              <a:t>© 가상 ICT 기업 · IT-SYS-001 · 사내 일반</a:t>
             </a:r>
           </a:p>
         </p:txBody>
@@ -32548,7 +32548,7 @@
                 <a:ea typeface="Malgun Gothic"/>
                 <a:cs typeface="Malgun Gothic"/>
               </a:rPr>
-              <a:t>© HANWHA SYSTEMS ICT · IT-SYS-001 · 사내 일반</a:t>
+              <a:t>© 가상 ICT 기업 · IT-SYS-001 · 사내 일반</a:t>
             </a:r>
           </a:p>
         </p:txBody>
@@ -33087,7 +33087,7 @@
                 <a:ea typeface="Malgun Gothic"/>
                 <a:cs typeface="Malgun Gothic"/>
               </a:rPr>
-              <a:t>© HANWHA SYSTEMS ICT · IT-SYS-001 · 사내 일반</a:t>
+              <a:t>© 가상 ICT 기업 · IT-SYS-001 · 사내 일반</a:t>
             </a:r>
           </a:p>
         </p:txBody>
@@ -33745,7 +33745,7 @@
                 <a:ea typeface="Malgun Gothic"/>
                 <a:cs typeface="Malgun Gothic"/>
               </a:rPr>
-              <a:t>© HANWHA SYSTEMS ICT · IT-SYS-001 · 사내 일반</a:t>
+              <a:t>© 가상 ICT 기업 · IT-SYS-001 · 사내 일반</a:t>
             </a:r>
           </a:p>
         </p:txBody>
@@ -34521,7 +34521,7 @@
                 <a:ea typeface="Malgun Gothic"/>
                 <a:cs typeface="Malgun Gothic"/>
               </a:rPr>
-              <a:t>© HANWHA SYSTEMS ICT · IT-SYS-001 · 사내 일반</a:t>
+              <a:t>© 가상 ICT 기업 · IT-SYS-001 · 사내 일반</a:t>
             </a:r>
           </a:p>
         </p:txBody>
@@ -34769,7 +34769,7 @@
                 <a:ea typeface="Malgun Gothic"/>
                 <a:cs typeface="Malgun Gothic"/>
               </a:rPr>
-              <a:t>© HANWHA SYSTEMS ICT · IT-SYS-001 · 사내 일반</a:t>
+              <a:t>© 가상 ICT 기업 · IT-SYS-001 · 사내 일반</a:t>
             </a:r>
           </a:p>
         </p:txBody>
@@ -35326,7 +35326,7 @@
                 <a:ea typeface="Malgun Gothic"/>
                 <a:cs typeface="Malgun Gothic"/>
               </a:rPr>
-              <a:t>© HANWHA SYSTEMS ICT · IT-SYS-001 · 사내 일반</a:t>
+              <a:t>© 가상 ICT 기업 · IT-SYS-001 · 사내 일반</a:t>
             </a:r>
           </a:p>
         </p:txBody>
@@ -35574,7 +35574,7 @@
                 <a:ea typeface="Malgun Gothic"/>
                 <a:cs typeface="Malgun Gothic"/>
               </a:rPr>
-              <a:t>© HANWHA SYSTEMS ICT · IT-SYS-001 · 사내 일반</a:t>
+              <a:t>© 가상 ICT 기업 · IT-SYS-001 · 사내 일반</a:t>
             </a:r>
           </a:p>
         </p:txBody>
@@ -35822,7 +35822,7 @@
                 <a:ea typeface="Malgun Gothic"/>
                 <a:cs typeface="Malgun Gothic"/>
               </a:rPr>
-              <a:t>© HANWHA SYSTEMS ICT · IT-SYS-001 · 사내 일반</a:t>
+              <a:t>© 가상 ICT 기업 · IT-SYS-001 · 사내 일반</a:t>
             </a:r>
           </a:p>
         </p:txBody>
@@ -36387,7 +36387,7 @@
                 <a:ea typeface="Malgun Gothic"/>
                 <a:cs typeface="Malgun Gothic"/>
               </a:rPr>
-              <a:t>© HANWHA SYSTEMS ICT · IT-SYS-001 · 사내 일반</a:t>
+              <a:t>© 가상 ICT 기업 · IT-SYS-001 · 사내 일반</a:t>
             </a:r>
           </a:p>
         </p:txBody>
@@ -36635,7 +36635,7 @@
                 <a:ea typeface="Malgun Gothic"/>
                 <a:cs typeface="Malgun Gothic"/>
               </a:rPr>
-              <a:t>© HANWHA SYSTEMS ICT · IT-SYS-001 · 사내 일반</a:t>
+              <a:t>© 가상 ICT 기업 · IT-SYS-001 · 사내 일반</a:t>
             </a:r>
           </a:p>
         </p:txBody>
@@ -37147,7 +37147,7 @@
                           <a:ea typeface="Malgun Gothic"/>
                           <a:cs typeface="Malgun Gothic"/>
                         </a:rPr>
-                        <a:t>사내 IT 포털(hanwha-admin) 상단 [챗봇 문의]</a:t>
+                        <a:t>사내 IT 포털 상단 [챗봇 문의]</a:t>
                       </a:r>
                     </a:p>
                   </a:txBody>
@@ -37839,7 +37839,7 @@
                           <a:ea typeface="Malgun Gothic"/>
                           <a:cs typeface="Malgun Gothic"/>
                         </a:rPr>
-                        <a:t>it-helpdesk@hanwha-ict.example</a:t>
+                        <a:t>it-helpdesk@ict.example</a:t>
                       </a:r>
                     </a:p>
                   </a:txBody>
@@ -38138,7 +38138,7 @@
                 <a:ea typeface="Malgun Gothic"/>
                 <a:cs typeface="Malgun Gothic"/>
               </a:rPr>
-              <a:t>© HANWHA SYSTEMS ICT · IT-SYS-001 · 사내 일반</a:t>
+              <a:t>© 가상 ICT 기업 · IT-SYS-001 · 사내 일반</a:t>
             </a:r>
           </a:p>
         </p:txBody>
@@ -38386,7 +38386,7 @@
                 <a:ea typeface="Malgun Gothic"/>
                 <a:cs typeface="Malgun Gothic"/>
               </a:rPr>
-              <a:t>© HANWHA SYSTEMS ICT · IT-SYS-001 · 사내 일반</a:t>
+              <a:t>© 가상 ICT 기업 · IT-SYS-001 · 사내 일반</a:t>
             </a:r>
           </a:p>
         </p:txBody>
@@ -40266,7 +40266,7 @@
                 <a:ea typeface="Malgun Gothic"/>
                 <a:cs typeface="Malgun Gothic"/>
               </a:rPr>
-              <a:t>© HANWHA SYSTEMS ICT · IT-SYS-001 · 사내 일반</a:t>
+              <a:t>© 가상 ICT 기업 · IT-SYS-001 · 사내 일반</a:t>
             </a:r>
           </a:p>
         </p:txBody>
@@ -41243,7 +41243,7 @@
                 <a:ea typeface="Malgun Gothic"/>
                 <a:cs typeface="Malgun Gothic"/>
               </a:rPr>
-              <a:t>© HANWHA SYSTEMS ICT · IT-SYS-001 · 사내 일반</a:t>
+              <a:t>© 가상 ICT 기업 · IT-SYS-001 · 사내 일반</a:t>
             </a:r>
           </a:p>
         </p:txBody>
@@ -42123,7 +42123,7 @@
                 <a:ea typeface="Malgun Gothic"/>
                 <a:cs typeface="Malgun Gothic"/>
               </a:rPr>
-              <a:t>© HANWHA SYSTEMS ICT · IT-SYS-001 · 사내 일반</a:t>
+              <a:t>© 가상 ICT 기업 · IT-SYS-001 · 사내 일반</a:t>
             </a:r>
           </a:p>
         </p:txBody>
@@ -42371,7 +42371,7 @@
                 <a:ea typeface="Malgun Gothic"/>
                 <a:cs typeface="Malgun Gothic"/>
               </a:rPr>
-              <a:t>© HANWHA SYSTEMS ICT · IT-SYS-001 · 사내 일반</a:t>
+              <a:t>© 가상 ICT 기업 · IT-SYS-001 · 사내 일반</a:t>
             </a:r>
           </a:p>
         </p:txBody>
@@ -43030,7 +43030,7 @@
                 <a:ea typeface="Malgun Gothic"/>
                 <a:cs typeface="Malgun Gothic"/>
               </a:rPr>
-              <a:t>© HANWHA SYSTEMS ICT · IT-SYS-001 · 사내 일반</a:t>
+              <a:t>© 가상 ICT 기업 · IT-SYS-001 · 사내 일반</a:t>
             </a:r>
           </a:p>
         </p:txBody>
@@ -43278,7 +43278,7 @@
                 <a:ea typeface="Malgun Gothic"/>
                 <a:cs typeface="Malgun Gothic"/>
               </a:rPr>
-              <a:t>© HANWHA SYSTEMS ICT · IT-SYS-001 · 사내 일반</a:t>
+              <a:t>© 가상 ICT 기업 · IT-SYS-001 · 사내 일반</a:t>
             </a:r>
           </a:p>
         </p:txBody>
@@ -45792,7 +45792,7 @@
                 <a:ea typeface="Malgun Gothic"/>
                 <a:cs typeface="Malgun Gothic"/>
               </a:rPr>
-              <a:t>© HANWHA SYSTEMS ICT · IT-SYS-001 · 사내 일반</a:t>
+              <a:t>© 가상 ICT 기업 · IT-SYS-001 · 사내 일반</a:t>
             </a:r>
           </a:p>
         </p:txBody>
